--- a/folien/15-ressourcen-lizenzen.pptx
+++ b/folien/15-ressourcen-lizenzen.pptx
@@ -4605,178 +4605,33 @@
           </a:p>
         </p:txBody>
       </p:sp>
-      <p:sp>
-        <p:nvSpPr>
-          <p:cNvPr id="5" name="Text 3"/>
-          <p:cNvSpPr/>
-          <p:nvPr/>
-        </p:nvSpPr>
-        <p:spPr>
-          <a:xfrm>
-            <a:off x="566928" y="1444752"/>
-            <a:ext cx="8010144" cy="438912"/>
-          </a:xfrm>
-          <a:prstGeom prst="rect">
-            <a:avLst/>
-          </a:prstGeom>
-          <a:noFill/>
-          <a:ln/>
-        </p:spPr>
-        <p:txBody>
-          <a:bodyPr wrap="square" lIns="0" tIns="0" rIns="0" bIns="0" rtlCol="0" anchor="t"/>
-          <a:lstStyle/>
-          <a:p>
-            <a:pPr indent="0" marL="0">
-              <a:buNone/>
-            </a:pPr>
-            <a:r>
-              <a:rPr lang="en-US" sz="1300" dirty="0">
-                <a:solidFill>
-                  <a:srgbClr val="5C6377"/>
-                </a:solidFill>
-                <a:latin typeface="Arial" pitchFamily="34" charset="0"/>
-                <a:ea typeface="Arial" pitchFamily="34" charset="-122"/>
-                <a:cs typeface="Arial" pitchFamily="34" charset="-120"/>
-              </a:rPr>
-              <a:t>Fällt ein Host aus, sollen seine VMs auf dem anderen weiterlaufen. Dann gilt:</a:t>
-            </a:r>
-            <a:endParaRPr lang="en-US" sz="1300" dirty="0"/>
-          </a:p>
-        </p:txBody>
-      </p:sp>
-      <p:sp>
-        <p:nvSpPr>
-          <p:cNvPr id="6" name="Text 4"/>
-          <p:cNvSpPr/>
-          <p:nvPr/>
-        </p:nvSpPr>
-        <p:spPr>
-          <a:xfrm>
-            <a:off x="566928" y="1965960"/>
-            <a:ext cx="8010144" cy="1828800"/>
-          </a:xfrm>
-          <a:prstGeom prst="rect">
-            <a:avLst/>
-          </a:prstGeom>
-          <a:noFill/>
-          <a:ln/>
-        </p:spPr>
-        <p:txBody>
-          <a:bodyPr wrap="square" lIns="0" tIns="0" rIns="0" bIns="0" rtlCol="0" anchor="t"/>
-          <a:lstStyle/>
-          <a:p>
-            <a:pPr marL="254000" indent="-254000">
-              <a:lnSpc>
-                <a:spcPct val="100000"/>
-              </a:lnSpc>
-              <a:spcAft>
-                <a:spcPts val="900"/>
-              </a:spcAft>
-              <a:buClr>
-                <a:srgbClr val="9A6310"/>
-              </a:buClr>
-              <a:buSzPct val="100000"/>
-              <a:buChar char="▸"/>
-            </a:pPr>
-            <a:r>
-              <a:rPr lang="en-US" sz="1250" dirty="0">
-                <a:solidFill>
-                  <a:srgbClr val="434A63"/>
-                </a:solidFill>
-                <a:latin typeface="Arial" pitchFamily="34" charset="0"/>
-                <a:ea typeface="Arial" pitchFamily="34" charset="-122"/>
-                <a:cs typeface="Arial" pitchFamily="34" charset="-120"/>
-              </a:rPr>
-              <a:t>Die Lizenz gehört zu einem Host, nicht zur VM. Eine VM nimmt ihre Lizenz beim Umzug nicht mit.</a:t>
-            </a:r>
-            <a:endParaRPr lang="en-US" sz="1250" dirty="0"/>
-          </a:p>
-          <a:p>
-            <a:pPr marL="254000" indent="-254000">
-              <a:lnSpc>
-                <a:spcPct val="100000"/>
-              </a:lnSpc>
-              <a:spcAft>
-                <a:spcPts val="900"/>
-              </a:spcAft>
-              <a:buClr>
-                <a:srgbClr val="9A6310"/>
-              </a:buClr>
-              <a:buSzPct val="100000"/>
-              <a:buChar char="▸"/>
-            </a:pPr>
-            <a:r>
-              <a:rPr lang="en-US" sz="1250" dirty="0">
-                <a:solidFill>
-                  <a:srgbClr val="434A63"/>
-                </a:solidFill>
-                <a:latin typeface="Arial" pitchFamily="34" charset="0"/>
-                <a:ea typeface="Arial" pitchFamily="34" charset="-122"/>
-                <a:cs typeface="Arial" pitchFamily="34" charset="-120"/>
-              </a:rPr>
-              <a:t>Eine Lizenz darf nur alle 90 Tage auf einen anderen Host umgezogen werden.</a:t>
-            </a:r>
-            <a:endParaRPr lang="en-US" sz="1250" dirty="0"/>
-          </a:p>
-          <a:p>
-            <a:pPr marL="254000" indent="-254000">
-              <a:lnSpc>
-                <a:spcPct val="100000"/>
-              </a:lnSpc>
-              <a:spcAft>
-                <a:spcPts val="900"/>
-              </a:spcAft>
-              <a:buClr>
-                <a:srgbClr val="9A6310"/>
-              </a:buClr>
-              <a:buSzPct val="100000"/>
-              <a:buChar char="▸"/>
-            </a:pPr>
-            <a:r>
-              <a:rPr lang="en-US" sz="1250" dirty="0">
-                <a:solidFill>
-                  <a:srgbClr val="434A63"/>
-                </a:solidFill>
-                <a:latin typeface="Arial" pitchFamily="34" charset="0"/>
-                <a:ea typeface="Arial" pitchFamily="34" charset="-122"/>
-                <a:cs typeface="Arial" pitchFamily="34" charset="-120"/>
-              </a:rPr>
-              <a:t>Deshalb muss jeder Host so lizenziert sein, als liefen alle VMs auf ihm.</a:t>
-            </a:r>
-            <a:endParaRPr lang="en-US" sz="1250" dirty="0"/>
-          </a:p>
-          <a:p>
-            <a:pPr marL="254000" indent="-254000">
-              <a:lnSpc>
-                <a:spcPct val="100000"/>
-              </a:lnSpc>
-              <a:spcAft>
-                <a:spcPts val="900"/>
-              </a:spcAft>
-              <a:buClr>
-                <a:srgbClr val="9A6310"/>
-              </a:buClr>
-              <a:buSzPct val="100000"/>
-              <a:buChar char="▸"/>
-            </a:pPr>
-            <a:r>
-              <a:rPr lang="en-US" sz="1250" dirty="0">
-                <a:solidFill>
-                  <a:srgbClr val="434A63"/>
-                </a:solidFill>
-                <a:latin typeface="Arial" pitchFamily="34" charset="0"/>
-                <a:ea typeface="Arial" pitchFamily="34" charset="-122"/>
-                <a:cs typeface="Arial" pitchFamily="34" charset="-120"/>
-              </a:rPr>
-              <a:t>Beispiel: 4 VMs, 2 Hosts. Jeder Host braucht 2 Standard-Lizenzen, zusammen also 4.</a:t>
-            </a:r>
-            <a:endParaRPr lang="en-US" sz="1250" dirty="0"/>
-          </a:p>
-        </p:txBody>
-      </p:sp>
-      <p:sp>
-        <p:nvSpPr>
-          <p:cNvPr id="7" name="Shape 5"/>
+      <p:pic>
+        <p:nvPicPr>
+          <p:cNvPr id="5" name="Image 0" descr="/Users/jacobmenge/Desktop/kurs-26.2b-orga/folienwerkstatt/assets/diagramme/ress-zwei-hosts.png">    </p:cNvPr>
+          <p:cNvPicPr>
+            <a:picLocks noChangeAspect="1"/>
+          </p:cNvPicPr>
+          <p:nvPr/>
+        </p:nvPicPr>
+        <p:blipFill>
+          <a:blip r:embed="rId1"/>
+          <a:stretch>
+            <a:fillRect/>
+          </a:stretch>
+        </p:blipFill>
+        <p:spPr>
+          <a:xfrm>
+            <a:off x="566928" y="1335024"/>
+            <a:ext cx="8010144" cy="2560320"/>
+          </a:xfrm>
+          <a:prstGeom prst="rect">
+            <a:avLst/>
+          </a:prstGeom>
+        </p:spPr>
+      </p:pic>
+      <p:sp>
+        <p:nvSpPr>
+          <p:cNvPr id="6" name="Shape 3"/>
           <p:cNvSpPr/>
           <p:nvPr/>
         </p:nvSpPr>
@@ -4796,7 +4651,7 @@
       </p:sp>
       <p:sp>
         <p:nvSpPr>
-          <p:cNvPr id="8" name="Text 6"/>
+          <p:cNvPr id="7" name="Text 4"/>
           <p:cNvSpPr/>
           <p:nvPr/>
         </p:nvSpPr>
@@ -4835,7 +4690,7 @@
       </p:sp>
       <p:sp>
         <p:nvSpPr>
-          <p:cNvPr id="9" name="Shape 7"/>
+          <p:cNvPr id="8" name="Shape 5"/>
           <p:cNvSpPr/>
           <p:nvPr/>
         </p:nvSpPr>
@@ -4858,7 +4713,7 @@
       </p:sp>
       <p:sp>
         <p:nvSpPr>
-          <p:cNvPr id="10" name="Text 8"/>
+          <p:cNvPr id="9" name="Text 6"/>
           <p:cNvSpPr/>
           <p:nvPr/>
         </p:nvSpPr>
@@ -4897,7 +4752,7 @@
       </p:sp>
       <p:sp>
         <p:nvSpPr>
-          <p:cNvPr id="11" name="Text 9"/>
+          <p:cNvPr id="10" name="Text 7"/>
           <p:cNvSpPr/>
           <p:nvPr/>
         </p:nvSpPr>
@@ -14236,7 +14091,7 @@
         <p:spPr>
           <a:xfrm>
             <a:off x="566928" y="1335024"/>
-            <a:ext cx="8010144" cy="2560320"/>
+            <a:ext cx="8010144" cy="3072384"/>
           </a:xfrm>
           <a:prstGeom prst="rect">
             <a:avLst/>
